--- a/Java_Groupe6.pptx
+++ b/Java_Groupe6.pptx
@@ -2845,7 +2845,7 @@
               </a:spcAft>
               <a:buNone/>
             </a:pPr>
-            <a:endParaRPr sz="1200">
+            <a:endParaRPr sz="1200" dirty="0">
               <a:solidFill>
                 <a:schemeClr val="dk1"/>
               </a:solidFill>
@@ -26672,7 +26672,70 @@
                 <a:cs typeface="Courier New"/>
                 <a:sym typeface="Courier New"/>
               </a:rPr>
-              <a:t>FIN POUR</a:t>
+              <a:t>FIN </a:t>
+            </a:r>
+            <a:r>
+              <a:rPr lang="fr" sz="1300" dirty="0" smtClean="0">
+                <a:solidFill>
+                  <a:srgbClr val="E2F0FF"/>
+                </a:solidFill>
+                <a:latin typeface="Courier New"/>
+                <a:ea typeface="Courier New"/>
+                <a:cs typeface="Courier New"/>
+                <a:sym typeface="Courier New"/>
+              </a:rPr>
+              <a:t>POUR</a:t>
+            </a:r>
+          </a:p>
+          <a:p>
+            <a:pPr marL="0" lvl="0" indent="0" algn="l" rtl="0">
+              <a:spcBef>
+                <a:spcPts val="0"/>
+              </a:spcBef>
+              <a:spcAft>
+                <a:spcPts val="0"/>
+              </a:spcAft>
+              <a:buClr>
+                <a:srgbClr val="E2F0FF"/>
+              </a:buClr>
+              <a:buSzPts val="1300"/>
+              <a:buFont typeface="Courier New"/>
+              <a:buNone/>
+            </a:pPr>
+            <a:endParaRPr lang="fr" sz="1300" dirty="0">
+              <a:solidFill>
+                <a:srgbClr val="E2F0FF"/>
+              </a:solidFill>
+              <a:latin typeface="Courier New"/>
+              <a:cs typeface="Courier New"/>
+              <a:sym typeface="Courier New"/>
+            </a:endParaRPr>
+          </a:p>
+          <a:p>
+            <a:pPr marL="0" lvl="0" indent="0" algn="l" rtl="0">
+              <a:spcBef>
+                <a:spcPts val="0"/>
+              </a:spcBef>
+              <a:spcAft>
+                <a:spcPts val="0"/>
+              </a:spcAft>
+              <a:buClr>
+                <a:srgbClr val="E2F0FF"/>
+              </a:buClr>
+              <a:buSzPts val="1300"/>
+              <a:buFont typeface="Courier New"/>
+              <a:buNone/>
+            </a:pPr>
+            <a:r>
+              <a:rPr lang="fr" sz="1300" dirty="0" smtClean="0">
+                <a:solidFill>
+                  <a:srgbClr val="E2F0FF"/>
+                </a:solidFill>
+                <a:latin typeface="Courier New"/>
+                <a:cs typeface="Courier New"/>
+                <a:sym typeface="Courier New"/>
+              </a:rPr>
+              <a:t>RETOURNER -1</a:t>
             </a:r>
             <a:endParaRPr dirty="0"/>
           </a:p>
@@ -29307,7 +29370,7 @@
         </p:nvSpPr>
         <p:spPr>
           <a:xfrm>
-            <a:off x="4785896" y="1749337"/>
+            <a:off x="4785896" y="1619971"/>
             <a:ext cx="3657600" cy="228600"/>
           </a:xfrm>
           <a:prstGeom prst="rect">
@@ -29370,8 +29433,8 @@
         </p:nvSpPr>
         <p:spPr>
           <a:xfrm>
-            <a:off x="4785896" y="2110525"/>
-            <a:ext cx="4252650" cy="2852928"/>
+            <a:off x="4785896" y="1830921"/>
+            <a:ext cx="4252650" cy="3312579"/>
           </a:xfrm>
           <a:prstGeom prst="rect">
             <a:avLst/>
@@ -29531,7 +29594,7 @@
               <a:t>d </a:t>
             </a:r>
             <a:r>
-              <a:rPr lang="fr" sz="1300" dirty="0">
+              <a:rPr lang="fr" sz="1300" dirty="0" smtClean="0">
                 <a:solidFill>
                   <a:srgbClr val="E2F0FF"/>
                 </a:solidFill>
@@ -29542,6 +29605,22 @@
               </a:rPr>
               <a:t>FAIRE</a:t>
             </a:r>
+          </a:p>
+          <a:p>
+            <a:pPr marL="0" lvl="0" indent="0" algn="l" rtl="0">
+              <a:spcBef>
+                <a:spcPts val="0"/>
+              </a:spcBef>
+              <a:spcAft>
+                <a:spcPts val="0"/>
+              </a:spcAft>
+              <a:buClr>
+                <a:srgbClr val="E2F0FF"/>
+              </a:buClr>
+              <a:buSzPts val="1300"/>
+              <a:buFont typeface="Courier New"/>
+              <a:buNone/>
+            </a:pPr>
             <a:endParaRPr sz="1300" dirty="0">
               <a:solidFill>
                 <a:schemeClr val="dk1"/>
@@ -29677,22 +29756,10 @@
                 <a:cs typeface="Courier New"/>
                 <a:sym typeface="Courier New"/>
               </a:rPr>
-              <a:t>  SI tab[m</a:t>
+              <a:t>  SI tab[m] </a:t>
             </a:r>
             <a:r>
-              <a:rPr lang="fr" sz="1300">
-                <a:solidFill>
-                  <a:srgbClr val="E2F0FF"/>
-                </a:solidFill>
-                <a:latin typeface="Courier New"/>
-                <a:ea typeface="Courier New"/>
-                <a:cs typeface="Courier New"/>
-                <a:sym typeface="Courier New"/>
-              </a:rPr>
-              <a:t>] </a:t>
-            </a:r>
-            <a:r>
-              <a:rPr lang="fr" sz="1300" smtClean="0">
+              <a:rPr lang="fr" sz="1300" dirty="0" smtClean="0">
                 <a:solidFill>
                   <a:srgbClr val="E2F0FF"/>
                 </a:solidFill>
@@ -29750,7 +29817,43 @@
                 <a:cs typeface="Courier New"/>
                 <a:sym typeface="Courier New"/>
               </a:rPr>
-              <a:t>	afficher m</a:t>
+              <a:t>	</a:t>
+            </a:r>
+            <a:r>
+              <a:rPr lang="fr" sz="1300" dirty="0" smtClean="0">
+                <a:solidFill>
+                  <a:srgbClr val="E2F0FF"/>
+                </a:solidFill>
+                <a:latin typeface="Courier New"/>
+                <a:ea typeface="Courier New"/>
+                <a:cs typeface="Courier New"/>
+                <a:sym typeface="Courier New"/>
+              </a:rPr>
+              <a:t>Retourner</a:t>
+            </a:r>
+            <a:r>
+              <a:rPr lang="fr" sz="1300" dirty="0" smtClean="0">
+                <a:solidFill>
+                  <a:srgbClr val="E2F0FF"/>
+                </a:solidFill>
+                <a:latin typeface="Courier New"/>
+                <a:ea typeface="Courier New"/>
+                <a:cs typeface="Courier New"/>
+                <a:sym typeface="Courier New"/>
+              </a:rPr>
+              <a:t> </a:t>
+            </a:r>
+            <a:r>
+              <a:rPr lang="fr" sz="1300" dirty="0">
+                <a:solidFill>
+                  <a:srgbClr val="E2F0FF"/>
+                </a:solidFill>
+                <a:latin typeface="Courier New"/>
+                <a:ea typeface="Courier New"/>
+                <a:cs typeface="Courier New"/>
+                <a:sym typeface="Courier New"/>
+              </a:rPr>
+              <a:t>m</a:t>
             </a:r>
             <a:endParaRPr sz="1300" dirty="0">
               <a:solidFill>
@@ -29782,7 +29885,31 @@
                 <a:cs typeface="Courier New"/>
                 <a:sym typeface="Courier New"/>
               </a:rPr>
-              <a:t>  SI tab[m] &lt; element ALORS</a:t>
+              <a:t>  </a:t>
+            </a:r>
+            <a:r>
+              <a:rPr lang="fr" sz="1300" dirty="0" smtClean="0">
+                <a:solidFill>
+                  <a:srgbClr val="E2F0FF"/>
+                </a:solidFill>
+                <a:latin typeface="Courier New"/>
+                <a:ea typeface="Courier New"/>
+                <a:cs typeface="Courier New"/>
+                <a:sym typeface="Courier New"/>
+              </a:rPr>
+              <a:t>SINON SI </a:t>
+            </a:r>
+            <a:r>
+              <a:rPr lang="fr" sz="1300" dirty="0">
+                <a:solidFill>
+                  <a:srgbClr val="E2F0FF"/>
+                </a:solidFill>
+                <a:latin typeface="Courier New"/>
+                <a:ea typeface="Courier New"/>
+                <a:cs typeface="Courier New"/>
+                <a:sym typeface="Courier New"/>
+              </a:rPr>
+              <a:t>tab[m] &lt; element ALORS</a:t>
             </a:r>
             <a:endParaRPr sz="1300" dirty="0">
               <a:solidFill>
@@ -29915,8 +30042,31 @@
                 <a:cs typeface="Courier New"/>
                 <a:sym typeface="Courier New"/>
               </a:rPr>
-              <a:t>  FIN SI</a:t>
+              <a:t>  FIN </a:t>
             </a:r>
+            <a:r>
+              <a:rPr lang="fr" sz="1300" dirty="0" smtClean="0">
+                <a:solidFill>
+                  <a:srgbClr val="E2F0FF"/>
+                </a:solidFill>
+                <a:latin typeface="Courier New"/>
+                <a:ea typeface="Courier New"/>
+                <a:cs typeface="Courier New"/>
+                <a:sym typeface="Courier New"/>
+              </a:rPr>
+              <a:t>SI</a:t>
+            </a:r>
+          </a:p>
+          <a:p>
+            <a:pPr marL="0" lvl="0" indent="0" algn="l" rtl="0">
+              <a:spcBef>
+                <a:spcPts val="0"/>
+              </a:spcBef>
+              <a:spcAft>
+                <a:spcPts val="0"/>
+              </a:spcAft>
+              <a:buNone/>
+            </a:pPr>
             <a:endParaRPr sz="1300" dirty="0">
               <a:solidFill>
                 <a:srgbClr val="E2F0FF"/>
@@ -29947,9 +30097,32 @@
                 <a:cs typeface="Courier New"/>
                 <a:sym typeface="Courier New"/>
               </a:rPr>
-              <a:t>FIN TANT QUE</a:t>
+              <a:t>FIN TANT </a:t>
             </a:r>
-            <a:endParaRPr sz="1300" dirty="0">
+            <a:r>
+              <a:rPr lang="fr" sz="1300" dirty="0" smtClean="0">
+                <a:solidFill>
+                  <a:srgbClr val="E2F0FF"/>
+                </a:solidFill>
+                <a:latin typeface="Courier New"/>
+                <a:ea typeface="Courier New"/>
+                <a:cs typeface="Courier New"/>
+                <a:sym typeface="Courier New"/>
+              </a:rPr>
+              <a:t>QUE</a:t>
+            </a:r>
+          </a:p>
+          <a:p>
+            <a:pPr marL="0" lvl="0" indent="0" algn="l" rtl="0">
+              <a:spcBef>
+                <a:spcPts val="0"/>
+              </a:spcBef>
+              <a:spcAft>
+                <a:spcPts val="0"/>
+              </a:spcAft>
+              <a:buNone/>
+            </a:pPr>
+            <a:endParaRPr lang="fr" sz="1300" dirty="0" smtClean="0">
               <a:solidFill>
                 <a:srgbClr val="E2F0FF"/>
               </a:solidFill>
@@ -29960,20 +30133,27 @@
             </a:endParaRPr>
           </a:p>
           <a:p>
-            <a:pPr marL="0" lvl="0" indent="457200" algn="l" rtl="0">
-              <a:spcBef>
-                <a:spcPts val="0"/>
-              </a:spcBef>
-              <a:spcAft>
-                <a:spcPts val="0"/>
-              </a:spcAft>
-              <a:buClr>
-                <a:srgbClr val="E2F0FF"/>
-              </a:buClr>
-              <a:buSzPts val="1300"/>
-              <a:buFont typeface="Courier New"/>
+            <a:pPr marL="0" lvl="0" indent="0" algn="l" rtl="0">
+              <a:spcBef>
+                <a:spcPts val="0"/>
+              </a:spcBef>
+              <a:spcAft>
+                <a:spcPts val="0"/>
+              </a:spcAft>
               <a:buNone/>
             </a:pPr>
+            <a:r>
+              <a:rPr lang="fr" sz="1300" dirty="0" smtClean="0">
+                <a:solidFill>
+                  <a:srgbClr val="E2F0FF"/>
+                </a:solidFill>
+                <a:latin typeface="Courier New"/>
+                <a:ea typeface="Courier New"/>
+                <a:cs typeface="Courier New"/>
+                <a:sym typeface="Courier New"/>
+              </a:rPr>
+              <a:t>RETOURNER -1</a:t>
+            </a:r>
             <a:endParaRPr sz="1300" dirty="0">
               <a:solidFill>
                 <a:srgbClr val="E2F0FF"/>
@@ -32149,8 +32329,8 @@
         </p:nvSpPr>
         <p:spPr>
           <a:xfrm>
-            <a:off x="289560" y="4178678"/>
-            <a:ext cx="3848932" cy="731649"/>
+            <a:off x="289559" y="4178678"/>
+            <a:ext cx="4190343" cy="731649"/>
           </a:xfrm>
           <a:prstGeom prst="rect">
             <a:avLst/>
@@ -32340,7 +32520,19 @@
                 <a:cs typeface="Calibri"/>
                 <a:sym typeface="Wingdings" panose="05000000000000000000" pitchFamily="2" charset="2"/>
               </a:rPr>
-              <a:t> milieu = 4 + (6-4)/2 = 5  tab[5] = 10 = cible = </a:t>
+              <a:t> milieu = 4 + (6-4)/2 = 5  tab[5] = 10 = cible </a:t>
+            </a:r>
+            <a:r>
+              <a:rPr lang="fr" sz="1150" dirty="0" smtClean="0">
+                <a:solidFill>
+                  <a:schemeClr val="tx1"/>
+                </a:solidFill>
+                <a:latin typeface="Calibri"/>
+                <a:ea typeface="Calibri"/>
+                <a:cs typeface="Calibri"/>
+                <a:sym typeface="Wingdings" panose="05000000000000000000" pitchFamily="2" charset="2"/>
+              </a:rPr>
+              <a:t>, m=5 </a:t>
             </a:r>
             <a:endParaRPr lang="fr" sz="1150" dirty="0" smtClean="0">
               <a:solidFill>
@@ -38288,7 +38480,7 @@
               <a:buNone/>
             </a:pPr>
             <a:r>
-              <a:rPr lang="fr" sz="1100" i="1">
+              <a:rPr lang="fr" sz="1100" i="1" dirty="0">
                 <a:solidFill>
                   <a:srgbClr val="9BBFA0"/>
                 </a:solidFill>
@@ -38297,9 +38489,21 @@
                 <a:cs typeface="Calibri"/>
                 <a:sym typeface="Calibri"/>
               </a:rPr>
-              <a:t>Tableau initial :</a:t>
+              <a:t>Tableau initial </a:t>
             </a:r>
-            <a:endParaRPr sz="1100">
+            <a:r>
+              <a:rPr lang="fr" sz="1100" i="1" dirty="0" smtClean="0">
+                <a:solidFill>
+                  <a:srgbClr val="9BBFA0"/>
+                </a:solidFill>
+                <a:latin typeface="Calibri"/>
+                <a:ea typeface="Calibri"/>
+                <a:cs typeface="Calibri"/>
+                <a:sym typeface="Calibri"/>
+              </a:rPr>
+              <a:t>: n= 5</a:t>
+            </a:r>
+            <a:endParaRPr sz="1100" dirty="0">
               <a:solidFill>
                 <a:schemeClr val="dk1"/>
               </a:solidFill>
@@ -38943,8 +39147,8 @@
         </p:nvSpPr>
         <p:spPr>
           <a:xfrm>
-            <a:off x="4613148" y="1911227"/>
-            <a:ext cx="4069080" cy="3067751"/>
+            <a:off x="4613148" y="1847088"/>
+            <a:ext cx="4069080" cy="3167121"/>
           </a:xfrm>
           <a:prstGeom prst="rect">
             <a:avLst/>
@@ -39404,9 +39608,41 @@
                 <a:cs typeface="Courier New"/>
                 <a:sym typeface="Courier New"/>
               </a:rPr>
-              <a:t> i //echange tab[i] et tab[min]</a:t>
+              <a:t> </a:t>
             </a:r>
-            <a:endParaRPr sz="1300" dirty="0">
+            <a:r>
+              <a:rPr lang="fr" sz="1300" dirty="0" smtClean="0">
+                <a:solidFill>
+                  <a:srgbClr val="E2F0FF"/>
+                </a:solidFill>
+                <a:latin typeface="Courier New"/>
+                <a:ea typeface="Courier New"/>
+                <a:cs typeface="Courier New"/>
+                <a:sym typeface="Courier New"/>
+              </a:rPr>
+              <a:t>i ALORS</a:t>
+            </a:r>
+          </a:p>
+          <a:p>
+            <a:pPr lvl="0">
+              <a:buClr>
+                <a:srgbClr val="E2F0FF"/>
+              </a:buClr>
+              <a:buSzPts val="1300"/>
+            </a:pPr>
+            <a:r>
+              <a:rPr lang="fr" sz="1300" dirty="0" smtClean="0">
+                <a:solidFill>
+                  <a:srgbClr val="E2F0FF"/>
+                </a:solidFill>
+                <a:latin typeface="Courier New"/>
+                <a:ea typeface="Courier New"/>
+                <a:cs typeface="Courier New"/>
+                <a:sym typeface="Courier New"/>
+              </a:rPr>
+              <a:t> //echange tab[i] et tab[min]</a:t>
+            </a:r>
+            <a:endParaRPr sz="1300" dirty="0" smtClean="0">
               <a:solidFill>
                 <a:srgbClr val="E2F0FF"/>
               </a:solidFill>
@@ -39432,7 +39668,7 @@
               <a:buNone/>
             </a:pPr>
             <a:r>
-              <a:rPr lang="fr" sz="1300" dirty="0">
+              <a:rPr lang="fr" sz="1300" dirty="0" smtClean="0">
                 <a:solidFill>
                   <a:srgbClr val="E2F0FF"/>
                 </a:solidFill>
@@ -39441,33 +39677,9 @@
                 <a:cs typeface="Courier New"/>
                 <a:sym typeface="Courier New"/>
               </a:rPr>
-              <a:t>   </a:t>
+              <a:t>    temp = tab[i]</a:t>
             </a:r>
-            <a:r>
-              <a:rPr lang="fr" sz="1300" dirty="0" smtClean="0">
-                <a:solidFill>
-                  <a:srgbClr val="E2F0FF"/>
-                </a:solidFill>
-                <a:latin typeface="Courier New"/>
-                <a:ea typeface="Courier New"/>
-                <a:cs typeface="Courier New"/>
-                <a:sym typeface="Courier New"/>
-              </a:rPr>
-              <a:t> temp </a:t>
-            </a:r>
-            <a:r>
-              <a:rPr lang="fr" sz="1300" dirty="0">
-                <a:solidFill>
-                  <a:srgbClr val="E2F0FF"/>
-                </a:solidFill>
-                <a:latin typeface="Courier New"/>
-                <a:ea typeface="Courier New"/>
-                <a:cs typeface="Courier New"/>
-                <a:sym typeface="Courier New"/>
-              </a:rPr>
-              <a:t>= tab[i]</a:t>
-            </a:r>
-            <a:endParaRPr sz="1300" dirty="0">
+            <a:endParaRPr sz="1300" dirty="0" smtClean="0">
               <a:solidFill>
                 <a:srgbClr val="E2F0FF"/>
               </a:solidFill>
@@ -39493,7 +39705,7 @@
               <a:buNone/>
             </a:pPr>
             <a:r>
-              <a:rPr lang="fr" sz="1300" dirty="0">
+              <a:rPr lang="fr" sz="1300" dirty="0" smtClean="0">
                 <a:solidFill>
                   <a:srgbClr val="E2F0FF"/>
                 </a:solidFill>
@@ -39502,7 +39714,7 @@
                 <a:cs typeface="Courier New"/>
                 <a:sym typeface="Courier New"/>
               </a:rPr>
-              <a:t>   </a:t>
+              <a:t>    </a:t>
             </a:r>
             <a:r>
               <a:rPr lang="fr" sz="1300" dirty="0" smtClean="0">
@@ -39514,7 +39726,7 @@
                 <a:cs typeface="Courier New"/>
                 <a:sym typeface="Courier New"/>
               </a:rPr>
-              <a:t> tab[i</a:t>
+              <a:t>tab[i</a:t>
             </a:r>
             <a:r>
               <a:rPr lang="fr" sz="1300" dirty="0">
@@ -41087,31 +41299,6 @@
               <a:buFont typeface="Calibri"/>
               <a:buNone/>
             </a:pPr>
-            <a:endParaRPr lang="fr" sz="1100" i="1" dirty="0" smtClean="0">
-              <a:solidFill>
-                <a:srgbClr val="9BBFA0"/>
-              </a:solidFill>
-              <a:latin typeface="Calibri"/>
-              <a:ea typeface="Calibri"/>
-              <a:cs typeface="Calibri"/>
-              <a:sym typeface="Calibri"/>
-            </a:endParaRPr>
-          </a:p>
-          <a:p>
-            <a:pPr marL="0" marR="0" lvl="0" indent="0" algn="l" rtl="0">
-              <a:spcBef>
-                <a:spcPts val="0"/>
-              </a:spcBef>
-              <a:spcAft>
-                <a:spcPts val="0"/>
-              </a:spcAft>
-              <a:buClr>
-                <a:srgbClr val="9BBFA0"/>
-              </a:buClr>
-              <a:buSzPts val="1100"/>
-              <a:buFont typeface="Calibri"/>
-              <a:buNone/>
-            </a:pPr>
             <a:r>
               <a:rPr lang="fr" sz="1100" i="1" dirty="0" smtClean="0">
                 <a:solidFill>
@@ -41156,8 +41343,8 @@
         </p:nvSpPr>
         <p:spPr>
           <a:xfrm>
-            <a:off x="4810468" y="2116737"/>
-            <a:ext cx="3922052" cy="2782923"/>
+            <a:off x="4810468" y="1965961"/>
+            <a:ext cx="3922052" cy="2591050"/>
           </a:xfrm>
           <a:prstGeom prst="rect">
             <a:avLst/>
@@ -41196,7 +41383,7 @@
               <a:buNone/>
             </a:pPr>
             <a:r>
-              <a:rPr lang="fr" sz="1300" dirty="0">
+              <a:rPr lang="en-US" sz="1300" dirty="0" smtClean="0">
                 <a:solidFill>
                   <a:srgbClr val="E2F0FF"/>
                 </a:solidFill>
@@ -41205,7 +41392,56 @@
                 <a:cs typeface="Courier New"/>
                 <a:sym typeface="Courier New"/>
               </a:rPr>
-              <a:t>POUR i allant de 0 a n-2 </a:t>
+              <a:t>n = 5</a:t>
+            </a:r>
+            <a:endParaRPr lang="fr" sz="1300" dirty="0" smtClean="0">
+              <a:solidFill>
+                <a:srgbClr val="E2F0FF"/>
+              </a:solidFill>
+              <a:latin typeface="Courier New"/>
+              <a:ea typeface="Courier New"/>
+              <a:cs typeface="Courier New"/>
+              <a:sym typeface="Courier New"/>
+            </a:endParaRPr>
+          </a:p>
+          <a:p>
+            <a:pPr marL="0" lvl="0" indent="0" algn="l" rtl="0">
+              <a:spcBef>
+                <a:spcPts val="0"/>
+              </a:spcBef>
+              <a:spcAft>
+                <a:spcPts val="0"/>
+              </a:spcAft>
+              <a:buClr>
+                <a:srgbClr val="E2F0FF"/>
+              </a:buClr>
+              <a:buSzPts val="1300"/>
+              <a:buFont typeface="Courier New"/>
+              <a:buNone/>
+            </a:pPr>
+            <a:r>
+              <a:rPr lang="fr" sz="1300" dirty="0" smtClean="0">
+                <a:solidFill>
+                  <a:srgbClr val="E2F0FF"/>
+                </a:solidFill>
+                <a:latin typeface="Courier New"/>
+                <a:ea typeface="Courier New"/>
+                <a:cs typeface="Courier New"/>
+                <a:sym typeface="Courier New"/>
+              </a:rPr>
+              <a:t>POUR </a:t>
+            </a:r>
+            <a:r>
+              <a:rPr lang="fr" sz="1300" dirty="0">
+                <a:solidFill>
+                  <a:srgbClr val="E2F0FF"/>
+                </a:solidFill>
+                <a:latin typeface="Courier New"/>
+                <a:ea typeface="Courier New"/>
+                <a:cs typeface="Courier New"/>
+                <a:sym typeface="Courier New"/>
+              </a:rPr>
+              <a:t>i allant de 0 a n-2 </a:t>
             </a:r>
             <a:r>
               <a:rPr lang="fr" sz="1300" dirty="0" smtClean="0">
@@ -45219,8 +45455,8 @@
         </p:nvSpPr>
         <p:spPr>
           <a:xfrm>
-            <a:off x="5487714" y="1880978"/>
-            <a:ext cx="3580085" cy="2762100"/>
+            <a:off x="5487715" y="1811348"/>
+            <a:ext cx="3581334" cy="2842665"/>
           </a:xfrm>
           <a:prstGeom prst="rect">
             <a:avLst/>
@@ -45259,7 +45495,7 @@
               <a:buNone/>
             </a:pPr>
             <a:r>
-              <a:rPr lang="fr" sz="1300" dirty="0">
+              <a:rPr lang="en-US" sz="1300" dirty="0" smtClean="0">
                 <a:solidFill>
                   <a:srgbClr val="E2F0FF"/>
                 </a:solidFill>
@@ -45268,7 +45504,56 @@
                 <a:cs typeface="Courier New"/>
                 <a:sym typeface="Courier New"/>
               </a:rPr>
-              <a:t>POUR i allant de 1 À n-1 </a:t>
+              <a:t>n = 5</a:t>
+            </a:r>
+            <a:endParaRPr lang="fr" sz="1300" dirty="0" smtClean="0">
+              <a:solidFill>
+                <a:srgbClr val="E2F0FF"/>
+              </a:solidFill>
+              <a:latin typeface="Courier New"/>
+              <a:ea typeface="Courier New"/>
+              <a:cs typeface="Courier New"/>
+              <a:sym typeface="Courier New"/>
+            </a:endParaRPr>
+          </a:p>
+          <a:p>
+            <a:pPr marL="0" lvl="0" indent="0" algn="l" rtl="0">
+              <a:spcBef>
+                <a:spcPts val="0"/>
+              </a:spcBef>
+              <a:spcAft>
+                <a:spcPts val="0"/>
+              </a:spcAft>
+              <a:buClr>
+                <a:srgbClr val="E2F0FF"/>
+              </a:buClr>
+              <a:buSzPts val="1300"/>
+              <a:buFont typeface="Courier New"/>
+              <a:buNone/>
+            </a:pPr>
+            <a:r>
+              <a:rPr lang="fr" sz="1300" dirty="0" smtClean="0">
+                <a:solidFill>
+                  <a:srgbClr val="E2F0FF"/>
+                </a:solidFill>
+                <a:latin typeface="Courier New"/>
+                <a:ea typeface="Courier New"/>
+                <a:cs typeface="Courier New"/>
+                <a:sym typeface="Courier New"/>
+              </a:rPr>
+              <a:t>POUR </a:t>
+            </a:r>
+            <a:r>
+              <a:rPr lang="fr" sz="1300" dirty="0">
+                <a:solidFill>
+                  <a:srgbClr val="E2F0FF"/>
+                </a:solidFill>
+                <a:latin typeface="Courier New"/>
+                <a:ea typeface="Courier New"/>
+                <a:cs typeface="Courier New"/>
+                <a:sym typeface="Courier New"/>
+              </a:rPr>
+              <a:t>i allant de 1 À n-1 </a:t>
             </a:r>
             <a:r>
               <a:rPr lang="fr" sz="1300" dirty="0" smtClean="0">
@@ -45370,8 +45655,36 @@
                 <a:cs typeface="Courier New"/>
                 <a:sym typeface="Courier New"/>
               </a:rPr>
-              <a:t>  j = i - 1</a:t>
+              <a:t>  j = i </a:t>
             </a:r>
+            <a:r>
+              <a:rPr lang="fr" sz="1300" dirty="0" smtClean="0">
+                <a:solidFill>
+                  <a:srgbClr val="E2F0FF"/>
+                </a:solidFill>
+                <a:latin typeface="Courier New"/>
+                <a:ea typeface="Courier New"/>
+                <a:cs typeface="Courier New"/>
+                <a:sym typeface="Courier New"/>
+              </a:rPr>
+              <a:t>– 1</a:t>
+            </a:r>
+          </a:p>
+          <a:p>
+            <a:pPr marL="0" lvl="0" indent="0" algn="l" rtl="0">
+              <a:spcBef>
+                <a:spcPts val="0"/>
+              </a:spcBef>
+              <a:spcAft>
+                <a:spcPts val="0"/>
+              </a:spcAft>
+              <a:buClr>
+                <a:srgbClr val="E2F0FF"/>
+              </a:buClr>
+              <a:buSzPts val="1300"/>
+              <a:buFont typeface="Courier New"/>
+              <a:buNone/>
+            </a:pPr>
             <a:endParaRPr sz="1300" dirty="0">
               <a:solidFill>
                 <a:schemeClr val="dk1"/>
@@ -45537,30 +45850,10 @@
                 <a:cs typeface="Courier New"/>
                 <a:sym typeface="Courier New"/>
               </a:rPr>
-              <a:t>  FIN TANT QUE</a:t>
+              <a:t>  FIN TANT </a:t>
             </a:r>
-            <a:endParaRPr sz="1300" dirty="0">
-              <a:solidFill>
-                <a:srgbClr val="E2F0FF"/>
-              </a:solidFill>
-              <a:latin typeface="Courier New"/>
-              <a:ea typeface="Courier New"/>
-              <a:cs typeface="Courier New"/>
-              <a:sym typeface="Courier New"/>
-            </a:endParaRPr>
-          </a:p>
-          <a:p>
-            <a:pPr marL="0" lvl="0" indent="0" algn="l" rtl="0">
-              <a:spcBef>
-                <a:spcPts val="0"/>
-              </a:spcBef>
-              <a:spcAft>
-                <a:spcPts val="0"/>
-              </a:spcAft>
-              <a:buNone/>
-            </a:pPr>
             <a:r>
-              <a:rPr lang="fr" sz="1300" dirty="0">
+              <a:rPr lang="fr" sz="1300" dirty="0" smtClean="0">
                 <a:solidFill>
                   <a:srgbClr val="E2F0FF"/>
                 </a:solidFill>
@@ -45569,20 +45862,8 @@
                 <a:cs typeface="Courier New"/>
                 <a:sym typeface="Courier New"/>
               </a:rPr>
-              <a:t>  tab[j+1] = </a:t>
+              <a:t>QUE</a:t>
             </a:r>
-            <a:r>
-              <a:rPr lang="fr" sz="1300" dirty="0" smtClean="0">
-                <a:solidFill>
-                  <a:srgbClr val="E2F0FF"/>
-                </a:solidFill>
-                <a:latin typeface="Courier New"/>
-                <a:ea typeface="Courier New"/>
-                <a:cs typeface="Courier New"/>
-                <a:sym typeface="Courier New"/>
-              </a:rPr>
-              <a:t>cle</a:t>
-            </a:r>
           </a:p>
           <a:p>
             <a:pPr marL="0" lvl="0" indent="0" algn="l" rtl="0">
@@ -45592,6 +45873,11 @@
               <a:spcAft>
                 <a:spcPts val="0"/>
               </a:spcAft>
+              <a:buClr>
+                <a:srgbClr val="E2F0FF"/>
+              </a:buClr>
+              <a:buSzPts val="1300"/>
+              <a:buFont typeface="Courier New"/>
               <a:buNone/>
             </a:pPr>
             <a:endParaRPr sz="1300" dirty="0">
@@ -45624,8 +45910,31 @@
                 <a:cs typeface="Courier New"/>
                 <a:sym typeface="Courier New"/>
               </a:rPr>
-              <a:t>FIN POUR</a:t>
+              <a:t>  tab[j+1] = </a:t>
             </a:r>
+            <a:r>
+              <a:rPr lang="fr" sz="1300" dirty="0" smtClean="0">
+                <a:solidFill>
+                  <a:srgbClr val="E2F0FF"/>
+                </a:solidFill>
+                <a:latin typeface="Courier New"/>
+                <a:ea typeface="Courier New"/>
+                <a:cs typeface="Courier New"/>
+                <a:sym typeface="Courier New"/>
+              </a:rPr>
+              <a:t>cle</a:t>
+            </a:r>
+          </a:p>
+          <a:p>
+            <a:pPr marL="0" lvl="0" indent="0" algn="l" rtl="0">
+              <a:spcBef>
+                <a:spcPts val="0"/>
+              </a:spcBef>
+              <a:spcAft>
+                <a:spcPts val="0"/>
+              </a:spcAft>
+              <a:buNone/>
+            </a:pPr>
             <a:endParaRPr sz="1300" dirty="0">
               <a:solidFill>
                 <a:srgbClr val="E2F0FF"/>
@@ -45644,13 +45953,32 @@
               <a:spcAft>
                 <a:spcPts val="0"/>
               </a:spcAft>
-              <a:buClr>
-                <a:srgbClr val="E2F0FF"/>
-              </a:buClr>
-              <a:buSzPts val="1300"/>
-              <a:buFont typeface="Courier New"/>
               <a:buNone/>
             </a:pPr>
+            <a:r>
+              <a:rPr lang="fr" sz="1300" dirty="0">
+                <a:solidFill>
+                  <a:srgbClr val="E2F0FF"/>
+                </a:solidFill>
+                <a:latin typeface="Courier New"/>
+                <a:ea typeface="Courier New"/>
+                <a:cs typeface="Courier New"/>
+                <a:sym typeface="Courier New"/>
+              </a:rPr>
+              <a:t>FIN </a:t>
+            </a:r>
+            <a:r>
+              <a:rPr lang="fr" sz="1300" dirty="0" smtClean="0">
+                <a:solidFill>
+                  <a:srgbClr val="E2F0FF"/>
+                </a:solidFill>
+                <a:latin typeface="Courier New"/>
+                <a:ea typeface="Courier New"/>
+                <a:cs typeface="Courier New"/>
+                <a:sym typeface="Courier New"/>
+              </a:rPr>
+              <a:t>POUR</a:t>
+            </a:r>
             <a:endParaRPr sz="1300" dirty="0">
               <a:solidFill>
                 <a:srgbClr val="E2F0FF"/>
@@ -46910,19 +47238,7 @@
                 <a:cs typeface="Calibri"/>
                 <a:sym typeface="Calibri"/>
               </a:rPr>
-              <a:t>Étape </a:t>
-            </a:r>
-            <a:r>
-              <a:rPr lang="fr" sz="1100" dirty="0">
-                <a:solidFill>
-                  <a:srgbClr val="64748B"/>
-                </a:solidFill>
-                <a:latin typeface="Calibri"/>
-                <a:ea typeface="Calibri"/>
-                <a:cs typeface="Calibri"/>
-                <a:sym typeface="Calibri"/>
-              </a:rPr>
-              <a:t>2</a:t>
+              <a:t>Étape 2</a:t>
             </a:r>
             <a:r>
               <a:rPr lang="fr" sz="1100" dirty="0" smtClean="0">

--- a/Java_Groupe6.pptx
+++ b/Java_Groupe6.pptx
@@ -31573,7 +31573,7 @@
               <a:buNone/>
             </a:pPr>
             <a:r>
-              <a:rPr lang="fr" sz="1200">
+              <a:rPr lang="fr" sz="1200" dirty="0">
                 <a:solidFill>
                   <a:srgbClr val="F5F0E8"/>
                 </a:solidFill>
@@ -31584,7 +31584,7 @@
               </a:rPr>
               <a:t> </a:t>
             </a:r>
-            <a:endParaRPr/>
+            <a:endParaRPr dirty="0"/>
           </a:p>
           <a:p>
             <a:pPr marL="0" marR="0" lvl="0" indent="0" algn="l" rtl="0">
@@ -31597,7 +31597,7 @@
               <a:buNone/>
             </a:pPr>
             <a:r>
-              <a:rPr lang="fr" sz="1200">
+              <a:rPr lang="fr" sz="1200" dirty="0">
                 <a:solidFill>
                   <a:srgbClr val="F5F0E8"/>
                 </a:solidFill>
@@ -31609,7 +31609,7 @@
               <a:t>    </a:t>
             </a:r>
             <a:r>
-              <a:rPr lang="fr" sz="1200" b="1">
+              <a:rPr lang="fr" sz="1200" b="1" dirty="0">
                 <a:solidFill>
                   <a:srgbClr val="F5F0E8"/>
                 </a:solidFill>
@@ -31621,7 +31621,7 @@
               <a:t>Principe</a:t>
             </a:r>
             <a:r>
-              <a:rPr lang="fr" sz="1200">
+              <a:rPr lang="fr" sz="1200" dirty="0">
                 <a:solidFill>
                   <a:srgbClr val="F5F0E8"/>
                 </a:solidFill>
@@ -31633,7 +31633,7 @@
               <a:t> </a:t>
             </a:r>
             <a:r>
-              <a:rPr lang="fr" sz="1200" b="1">
+              <a:rPr lang="fr" sz="1200" b="1" dirty="0">
                 <a:solidFill>
                   <a:srgbClr val="F5F0E8"/>
                 </a:solidFill>
@@ -31645,7 +31645,7 @@
               <a:t>: </a:t>
             </a:r>
             <a:r>
-              <a:rPr lang="fr" sz="1200" b="1">
+              <a:rPr lang="fr" sz="1200" b="1" dirty="0">
                 <a:solidFill>
                   <a:schemeClr val="lt1"/>
                 </a:solidFill>
@@ -31654,10 +31654,58 @@
                 <a:cs typeface="Calibri"/>
                 <a:sym typeface="Calibri"/>
               </a:rPr>
-              <a:t>Diviser l'espace de recherche par 2 à chaque étape — tableau trié requis </a:t>
+              <a:t>Diviser l'espace de recherche par 2 </a:t>
             </a:r>
             <a:r>
-              <a:rPr lang="fr" sz="1200">
+              <a:rPr lang="fr" sz="1200" b="1" dirty="0" smtClean="0">
+                <a:solidFill>
+                  <a:schemeClr val="lt1"/>
+                </a:solidFill>
+                <a:latin typeface="Calibri"/>
+                <a:ea typeface="Calibri"/>
+                <a:cs typeface="Calibri"/>
+                <a:sym typeface="Calibri"/>
+              </a:rPr>
+              <a:t>en eliminant une moitie à </a:t>
+            </a:r>
+            <a:r>
+              <a:rPr lang="fr" sz="1200" b="1" dirty="0">
+                <a:solidFill>
+                  <a:schemeClr val="lt1"/>
+                </a:solidFill>
+                <a:latin typeface="Calibri"/>
+                <a:ea typeface="Calibri"/>
+                <a:cs typeface="Calibri"/>
+                <a:sym typeface="Calibri"/>
+              </a:rPr>
+              <a:t>chaque </a:t>
+            </a:r>
+            <a:r>
+              <a:rPr lang="fr" sz="1200" b="1">
+                <a:solidFill>
+                  <a:schemeClr val="lt1"/>
+                </a:solidFill>
+                <a:latin typeface="Calibri"/>
+                <a:ea typeface="Calibri"/>
+                <a:cs typeface="Calibri"/>
+                <a:sym typeface="Calibri"/>
+              </a:rPr>
+              <a:t>étape </a:t>
+            </a:r>
+            <a:r>
+              <a:rPr lang="fr" sz="1200" b="1" smtClean="0">
+                <a:solidFill>
+                  <a:schemeClr val="lt1"/>
+                </a:solidFill>
+                <a:latin typeface="Calibri"/>
+                <a:ea typeface="Calibri"/>
+                <a:cs typeface="Calibri"/>
+                <a:sym typeface="Calibri"/>
+              </a:rPr>
+              <a:t>dans un tableau trié</a:t>
+            </a:r>
+            <a:r>
+              <a:rPr lang="fr" sz="1200" smtClean="0">
                 <a:solidFill>
                   <a:schemeClr val="lt1"/>
                 </a:solidFill>
@@ -31668,7 +31716,7 @@
               </a:rPr>
               <a:t>.</a:t>
             </a:r>
-            <a:endParaRPr sz="1200">
+            <a:endParaRPr sz="1200" dirty="0">
               <a:solidFill>
                 <a:schemeClr val="lt1"/>
               </a:solidFill>
@@ -31688,7 +31736,7 @@
               </a:spcAft>
               <a:buNone/>
             </a:pPr>
-            <a:endParaRPr sz="1200">
+            <a:endParaRPr sz="1200" dirty="0">
               <a:solidFill>
                 <a:schemeClr val="lt1"/>
               </a:solidFill>
@@ -46853,7 +46901,7 @@
               <a:buNone/>
             </a:pPr>
             <a:r>
-              <a:rPr lang="fr" sz="1100">
+              <a:rPr lang="fr" sz="1100" dirty="0">
                 <a:solidFill>
                   <a:srgbClr val="64748B"/>
                 </a:solidFill>
@@ -46862,9 +46910,45 @@
                 <a:cs typeface="Calibri"/>
                 <a:sym typeface="Calibri"/>
               </a:rPr>
-              <a:t>Étape 3  :</a:t>
+              <a:t>Étape </a:t>
             </a:r>
-            <a:endParaRPr sz="1100">
+            <a:r>
+              <a:rPr lang="fr" sz="1100" dirty="0">
+                <a:solidFill>
+                  <a:srgbClr val="64748B"/>
+                </a:solidFill>
+                <a:latin typeface="Calibri"/>
+                <a:ea typeface="Calibri"/>
+                <a:cs typeface="Calibri"/>
+                <a:sym typeface="Calibri"/>
+              </a:rPr>
+              <a:t>2</a:t>
+            </a:r>
+            <a:r>
+              <a:rPr lang="fr" sz="1100" dirty="0" smtClean="0">
+                <a:solidFill>
+                  <a:srgbClr val="64748B"/>
+                </a:solidFill>
+                <a:latin typeface="Calibri"/>
+                <a:ea typeface="Calibri"/>
+                <a:cs typeface="Calibri"/>
+                <a:sym typeface="Calibri"/>
+              </a:rPr>
+              <a:t> </a:t>
+            </a:r>
+            <a:r>
+              <a:rPr lang="fr" sz="1100" dirty="0">
+                <a:solidFill>
+                  <a:srgbClr val="64748B"/>
+                </a:solidFill>
+                <a:latin typeface="Calibri"/>
+                <a:ea typeface="Calibri"/>
+                <a:cs typeface="Calibri"/>
+                <a:sym typeface="Calibri"/>
+              </a:rPr>
+              <a:t>:</a:t>
+            </a:r>
+            <a:endParaRPr sz="1100" dirty="0">
               <a:solidFill>
                 <a:schemeClr val="dk1"/>
               </a:solidFill>
@@ -47352,7 +47436,7 @@
               <a:buNone/>
             </a:pPr>
             <a:r>
-              <a:rPr lang="fr" sz="1100">
+              <a:rPr lang="fr" sz="1100" dirty="0">
                 <a:solidFill>
                   <a:srgbClr val="64748B"/>
                 </a:solidFill>
@@ -47361,9 +47445,33 @@
                 <a:cs typeface="Calibri"/>
                 <a:sym typeface="Calibri"/>
               </a:rPr>
-              <a:t>Étape 4  :</a:t>
+              <a:t>Étape </a:t>
             </a:r>
-            <a:endParaRPr sz="1100">
+            <a:r>
+              <a:rPr lang="fr" sz="1100" dirty="0" smtClean="0">
+                <a:solidFill>
+                  <a:srgbClr val="64748B"/>
+                </a:solidFill>
+                <a:latin typeface="Calibri"/>
+                <a:ea typeface="Calibri"/>
+                <a:cs typeface="Calibri"/>
+                <a:sym typeface="Calibri"/>
+              </a:rPr>
+              <a:t>3  </a:t>
+            </a:r>
+            <a:r>
+              <a:rPr lang="fr" sz="1100" dirty="0">
+                <a:solidFill>
+                  <a:srgbClr val="64748B"/>
+                </a:solidFill>
+                <a:latin typeface="Calibri"/>
+                <a:ea typeface="Calibri"/>
+                <a:cs typeface="Calibri"/>
+                <a:sym typeface="Calibri"/>
+              </a:rPr>
+              <a:t>:</a:t>
+            </a:r>
+            <a:endParaRPr sz="1100" dirty="0">
               <a:solidFill>
                 <a:schemeClr val="dk1"/>
               </a:solidFill>
@@ -47862,9 +47970,33 @@
                 <a:cs typeface="Calibri"/>
                 <a:sym typeface="Calibri"/>
               </a:rPr>
-              <a:t>Étape 5  :</a:t>
+              <a:t>Étape </a:t>
             </a:r>
-            <a:endParaRPr sz="1100">
+            <a:r>
+              <a:rPr lang="fr" sz="1100" smtClean="0">
+                <a:solidFill>
+                  <a:srgbClr val="64748B"/>
+                </a:solidFill>
+                <a:latin typeface="Calibri"/>
+                <a:ea typeface="Calibri"/>
+                <a:cs typeface="Calibri"/>
+                <a:sym typeface="Calibri"/>
+              </a:rPr>
+              <a:t>4  </a:t>
+            </a:r>
+            <a:r>
+              <a:rPr lang="fr" sz="1100">
+                <a:solidFill>
+                  <a:srgbClr val="64748B"/>
+                </a:solidFill>
+                <a:latin typeface="Calibri"/>
+                <a:ea typeface="Calibri"/>
+                <a:cs typeface="Calibri"/>
+                <a:sym typeface="Calibri"/>
+              </a:rPr>
+              <a:t>:</a:t>
+            </a:r>
+            <a:endParaRPr sz="1100" dirty="0">
               <a:solidFill>
                 <a:schemeClr val="dk1"/>
               </a:solidFill>

--- a/Java_Groupe6.pptx
+++ b/Java_Groupe6.pptx
@@ -29591,19 +29591,7 @@
                 <a:cs typeface="Courier New"/>
                 <a:sym typeface="Courier New"/>
               </a:rPr>
-              <a:t>d </a:t>
-            </a:r>
-            <a:r>
-              <a:rPr lang="fr" sz="1300" dirty="0" smtClean="0">
-                <a:solidFill>
-                  <a:srgbClr val="E2F0FF"/>
-                </a:solidFill>
-                <a:latin typeface="Courier New"/>
-                <a:ea typeface="Courier New"/>
-                <a:cs typeface="Courier New"/>
-                <a:sym typeface="Courier New"/>
-              </a:rPr>
-              <a:t>FAIRE</a:t>
+              <a:t>d FAIRE</a:t>
             </a:r>
           </a:p>
           <a:p>
@@ -29829,19 +29817,7 @@
                 <a:cs typeface="Courier New"/>
                 <a:sym typeface="Courier New"/>
               </a:rPr>
-              <a:t>Retourner</a:t>
-            </a:r>
-            <a:r>
-              <a:rPr lang="fr" sz="1300" dirty="0" smtClean="0">
-                <a:solidFill>
-                  <a:srgbClr val="E2F0FF"/>
-                </a:solidFill>
-                <a:latin typeface="Courier New"/>
-                <a:ea typeface="Courier New"/>
-                <a:cs typeface="Courier New"/>
-                <a:sym typeface="Courier New"/>
-              </a:rPr>
-              <a:t> </a:t>
+              <a:t>Retourner </a:t>
             </a:r>
             <a:r>
               <a:rPr lang="fr" sz="1300" dirty="0">
@@ -32520,19 +32496,7 @@
                 <a:cs typeface="Calibri"/>
                 <a:sym typeface="Wingdings" panose="05000000000000000000" pitchFamily="2" charset="2"/>
               </a:rPr>
-              <a:t> milieu = 4 + (6-4)/2 = 5  tab[5] = 10 = cible </a:t>
-            </a:r>
-            <a:r>
-              <a:rPr lang="fr" sz="1150" dirty="0" smtClean="0">
-                <a:solidFill>
-                  <a:schemeClr val="tx1"/>
-                </a:solidFill>
-                <a:latin typeface="Calibri"/>
-                <a:ea typeface="Calibri"/>
-                <a:cs typeface="Calibri"/>
-                <a:sym typeface="Wingdings" panose="05000000000000000000" pitchFamily="2" charset="2"/>
-              </a:rPr>
-              <a:t>, m=5 </a:t>
+              <a:t> milieu = 4 + (6-4)/2 = 5  tab[5] = 10 = cible , m=5 </a:t>
             </a:r>
             <a:endParaRPr lang="fr" sz="1150" dirty="0" smtClean="0">
               <a:solidFill>
@@ -39608,19 +39572,7 @@
                 <a:cs typeface="Courier New"/>
                 <a:sym typeface="Courier New"/>
               </a:rPr>
-              <a:t> </a:t>
-            </a:r>
-            <a:r>
-              <a:rPr lang="fr" sz="1300" dirty="0" smtClean="0">
-                <a:solidFill>
-                  <a:srgbClr val="E2F0FF"/>
-                </a:solidFill>
-                <a:latin typeface="Courier New"/>
-                <a:ea typeface="Courier New"/>
-                <a:cs typeface="Courier New"/>
-                <a:sym typeface="Courier New"/>
-              </a:rPr>
-              <a:t>i ALORS</a:t>
+              <a:t> i ALORS</a:t>
             </a:r>
           </a:p>
           <a:p>
@@ -39714,19 +39666,7 @@
                 <a:cs typeface="Courier New"/>
                 <a:sym typeface="Courier New"/>
               </a:rPr>
-              <a:t>    </a:t>
-            </a:r>
-            <a:r>
-              <a:rPr lang="fr" sz="1300" dirty="0" smtClean="0">
-                <a:solidFill>
-                  <a:srgbClr val="E2F0FF"/>
-                </a:solidFill>
-                <a:latin typeface="Courier New"/>
-                <a:ea typeface="Courier New"/>
-                <a:cs typeface="Courier New"/>
-                <a:sym typeface="Courier New"/>
-              </a:rPr>
-              <a:t>tab[i</a:t>
+              <a:t>    tab[i</a:t>
             </a:r>
             <a:r>
               <a:rPr lang="fr" sz="1300" dirty="0">
@@ -41343,8 +41283,8 @@
         </p:nvSpPr>
         <p:spPr>
           <a:xfrm>
-            <a:off x="4810468" y="1965961"/>
-            <a:ext cx="3922052" cy="2591050"/>
+            <a:off x="4810468" y="1965960"/>
+            <a:ext cx="3922052" cy="2670047"/>
           </a:xfrm>
           <a:prstGeom prst="rect">
             <a:avLst/>
